--- a/docs/poster/variants/v20.pptx
+++ b/docs/poster/variants/v20.pptx
@@ -3697,6 +3697,90 @@
               </a:spcAft>
             </a:pPr>
             <a:r>
+              <a:rPr sz="6200" b="1">
+                <a:solidFill>
+                  <a:srgbClr val="1C6FB5"/>
+                </a:solidFill>
+                <a:latin typeface="Arial Narrow"/>
+              </a:rPr>
+              <a:t>14</a:t>
+            </a:r>
+          </a:p>
+        </p:txBody>
+      </p:sp>
+      <p:sp>
+        <p:nvSpPr>
+          <p:cNvPr id="17" name="TextBox 16"/>
+          <p:cNvSpPr txBox="1"/>
+          <p:nvPr/>
+        </p:nvSpPr>
+        <p:spPr>
+          <a:xfrm>
+            <a:off x="731520" y="16961865"/>
+            <a:ext cx="20482560" cy="365760"/>
+          </a:xfrm>
+          <a:prstGeom prst="rect">
+            <a:avLst/>
+          </a:prstGeom>
+          <a:noFill/>
+        </p:spPr>
+        <p:txBody>
+          <a:bodyPr wrap="square" lIns="0" rIns="0" tIns="0" bIns="0">
+            <a:spAutoFit/>
+          </a:bodyPr>
+          <a:lstStyle/>
+          <a:p>
+            <a:pPr algn="l">
+              <a:lnSpc>
+                <a:spcPct val="122000"/>
+              </a:lnSpc>
+              <a:spcAft>
+                <a:spcPts val="600"/>
+              </a:spcAft>
+            </a:pPr>
+            <a:r>
+              <a:rPr sz="1700" b="0">
+                <a:solidFill>
+                  <a:srgbClr val="6A6A6A"/>
+                </a:solidFill>
+                <a:latin typeface="Arial"/>
+              </a:rPr>
+              <a:t>analysis tools the planner can choose from</a:t>
+            </a:r>
+          </a:p>
+        </p:txBody>
+      </p:sp>
+      <p:sp>
+        <p:nvSpPr>
+          <p:cNvPr id="18" name="TextBox 17"/>
+          <p:cNvSpPr txBox="1"/>
+          <p:nvPr/>
+        </p:nvSpPr>
+        <p:spPr>
+          <a:xfrm>
+            <a:off x="731520" y="17447767"/>
+            <a:ext cx="20482560" cy="365760"/>
+          </a:xfrm>
+          <a:prstGeom prst="rect">
+            <a:avLst/>
+          </a:prstGeom>
+          <a:noFill/>
+        </p:spPr>
+        <p:txBody>
+          <a:bodyPr wrap="square" lIns="0" rIns="0" tIns="0" bIns="0">
+            <a:spAutoFit/>
+          </a:bodyPr>
+          <a:lstStyle/>
+          <a:p>
+            <a:pPr algn="l">
+              <a:lnSpc>
+                <a:spcPct val="95000"/>
+              </a:lnSpc>
+              <a:spcAft>
+                <a:spcPts val="0"/>
+              </a:spcAft>
+            </a:pPr>
+            <a:r>
               <a:rPr sz="3600" b="1">
                 <a:solidFill>
                   <a:srgbClr val="1A1A1A"/>
@@ -3710,13 +3794,13 @@
       </p:sp>
       <p:sp>
         <p:nvSpPr>
-          <p:cNvPr id="17" name="Rectangle 16"/>
+          <p:cNvPr id="19" name="Rectangle 18"/>
           <p:cNvSpPr/>
           <p:nvPr/>
         </p:nvSpPr>
         <p:spPr>
           <a:xfrm>
-            <a:off x="731520" y="16753077"/>
+            <a:off x="731520" y="18042127"/>
             <a:ext cx="20482560" cy="27432"/>
           </a:xfrm>
           <a:prstGeom prst="rect">
@@ -3754,13 +3838,13 @@
       </p:sp>
       <p:sp>
         <p:nvSpPr>
-          <p:cNvPr id="18" name="TextBox 17"/>
+          <p:cNvPr id="20" name="TextBox 19"/>
           <p:cNvSpPr txBox="1"/>
           <p:nvPr/>
         </p:nvSpPr>
         <p:spPr>
           <a:xfrm>
-            <a:off x="731520" y="17082261"/>
+            <a:off x="731520" y="18371311"/>
             <a:ext cx="20482560" cy="365760"/>
           </a:xfrm>
           <a:prstGeom prst="rect">
@@ -3796,13 +3880,13 @@
       </p:sp>
       <p:sp>
         <p:nvSpPr>
-          <p:cNvPr id="19" name="TextBox 18"/>
+          <p:cNvPr id="21" name="TextBox 20"/>
           <p:cNvSpPr txBox="1"/>
           <p:nvPr/>
         </p:nvSpPr>
         <p:spPr>
           <a:xfrm>
-            <a:off x="731520" y="18849593"/>
+            <a:off x="731520" y="20138643"/>
             <a:ext cx="20482560" cy="365760"/>
           </a:xfrm>
           <a:prstGeom prst="rect">
@@ -3825,6 +3909,90 @@
               </a:spcAft>
             </a:pPr>
             <a:r>
+              <a:rPr sz="6200" b="1">
+                <a:solidFill>
+                  <a:srgbClr val="1C6FB5"/>
+                </a:solidFill>
+                <a:latin typeface="Arial Narrow"/>
+              </a:rPr>
+              <a:t>27</a:t>
+            </a:r>
+          </a:p>
+        </p:txBody>
+      </p:sp>
+      <p:sp>
+        <p:nvSpPr>
+          <p:cNvPr id="22" name="TextBox 21"/>
+          <p:cNvSpPr txBox="1"/>
+          <p:nvPr/>
+        </p:nvSpPr>
+        <p:spPr>
+          <a:xfrm>
+            <a:off x="731520" y="20941791"/>
+            <a:ext cx="20482560" cy="365760"/>
+          </a:xfrm>
+          <a:prstGeom prst="rect">
+            <a:avLst/>
+          </a:prstGeom>
+          <a:noFill/>
+        </p:spPr>
+        <p:txBody>
+          <a:bodyPr wrap="square" lIns="0" rIns="0" tIns="0" bIns="0">
+            <a:spAutoFit/>
+          </a:bodyPr>
+          <a:lstStyle/>
+          <a:p>
+            <a:pPr algn="l">
+              <a:lnSpc>
+                <a:spcPct val="122000"/>
+              </a:lnSpc>
+              <a:spcAft>
+                <a:spcPts val="600"/>
+              </a:spcAft>
+            </a:pPr>
+            <a:r>
+              <a:rPr sz="1700" b="0">
+                <a:solidFill>
+                  <a:srgbClr val="6A6A6A"/>
+                </a:solidFill>
+                <a:latin typeface="Arial"/>
+              </a:rPr>
+              <a:t>distinct models trained, run, or rejected</a:t>
+            </a:r>
+          </a:p>
+        </p:txBody>
+      </p:sp>
+      <p:sp>
+        <p:nvSpPr>
+          <p:cNvPr id="23" name="TextBox 22"/>
+          <p:cNvSpPr txBox="1"/>
+          <p:nvPr/>
+        </p:nvSpPr>
+        <p:spPr>
+          <a:xfrm>
+            <a:off x="731520" y="21427693"/>
+            <a:ext cx="20482560" cy="365760"/>
+          </a:xfrm>
+          <a:prstGeom prst="rect">
+            <a:avLst/>
+          </a:prstGeom>
+          <a:noFill/>
+        </p:spPr>
+        <p:txBody>
+          <a:bodyPr wrap="square" lIns="0" rIns="0" tIns="0" bIns="0">
+            <a:spAutoFit/>
+          </a:bodyPr>
+          <a:lstStyle/>
+          <a:p>
+            <a:pPr algn="l">
+              <a:lnSpc>
+                <a:spcPct val="95000"/>
+              </a:lnSpc>
+              <a:spcAft>
+                <a:spcPts val="0"/>
+              </a:spcAft>
+            </a:pPr>
+            <a:r>
               <a:rPr sz="3600" b="1">
                 <a:solidFill>
                   <a:srgbClr val="1A1A1A"/>
@@ -3838,13 +4006,13 @@
       </p:sp>
       <p:sp>
         <p:nvSpPr>
-          <p:cNvPr id="20" name="Rectangle 19"/>
+          <p:cNvPr id="24" name="Rectangle 23"/>
           <p:cNvSpPr/>
           <p:nvPr/>
         </p:nvSpPr>
         <p:spPr>
           <a:xfrm>
-            <a:off x="731520" y="19443953"/>
+            <a:off x="731520" y="22022053"/>
             <a:ext cx="20482560" cy="27432"/>
           </a:xfrm>
           <a:prstGeom prst="rect">
@@ -3882,7 +4050,7 @@
       </p:sp>
       <p:pic>
         <p:nvPicPr>
-          <p:cNvPr id="21" name="Picture 20" descr="m_ledger.png"/>
+          <p:cNvPr id="25" name="Picture 24" descr="m_ledger.png"/>
           <p:cNvPicPr>
             <a:picLocks noChangeAspect="1"/>
           </p:cNvPicPr>
@@ -3896,7 +4064,7 @@
         </p:blipFill>
         <p:spPr>
           <a:xfrm>
-            <a:off x="731520" y="19773137"/>
+            <a:off x="731520" y="22351237"/>
             <a:ext cx="20482560" cy="3749040"/>
           </a:xfrm>
           <a:prstGeom prst="rect">
@@ -3906,13 +4074,13 @@
       </p:pic>
       <p:sp>
         <p:nvSpPr>
-          <p:cNvPr id="22" name="TextBox 21"/>
+          <p:cNvPr id="26" name="TextBox 25"/>
           <p:cNvSpPr txBox="1"/>
           <p:nvPr/>
         </p:nvSpPr>
         <p:spPr>
           <a:xfrm>
-            <a:off x="731520" y="23631905"/>
+            <a:off x="731520" y="26210005"/>
             <a:ext cx="20482560" cy="365760"/>
           </a:xfrm>
           <a:prstGeom prst="rect">
@@ -3948,13 +4116,13 @@
       </p:sp>
       <p:sp>
         <p:nvSpPr>
-          <p:cNvPr id="23" name="TextBox 22"/>
+          <p:cNvPr id="27" name="TextBox 26"/>
           <p:cNvSpPr txBox="1"/>
           <p:nvPr/>
         </p:nvSpPr>
         <p:spPr>
           <a:xfrm>
-            <a:off x="731520" y="24707087"/>
+            <a:off x="731520" y="27285187"/>
             <a:ext cx="20482560" cy="365760"/>
           </a:xfrm>
           <a:prstGeom prst="rect">
@@ -3990,13 +4158,13 @@
       </p:sp>
       <p:sp>
         <p:nvSpPr>
-          <p:cNvPr id="24" name="TextBox 23"/>
+          <p:cNvPr id="28" name="TextBox 27"/>
           <p:cNvSpPr txBox="1"/>
           <p:nvPr/>
         </p:nvSpPr>
         <p:spPr>
           <a:xfrm>
-            <a:off x="731520" y="26133552"/>
+            <a:off x="22677120" y="10776965"/>
             <a:ext cx="20482560" cy="365760"/>
           </a:xfrm>
           <a:prstGeom prst="rect">
@@ -4025,20 +4193,20 @@
                 </a:solidFill>
                 <a:latin typeface="Arial Narrow"/>
               </a:rPr>
-              <a:t>On disk today</a:t>
-            </a:r>
-          </a:p>
-        </p:txBody>
-      </p:sp>
-      <p:sp>
-        <p:nvSpPr>
-          <p:cNvPr id="25" name="Rectangle 24"/>
+              <a:t>Robots on the platform today</a:t>
+            </a:r>
+          </a:p>
+        </p:txBody>
+      </p:sp>
+      <p:sp>
+        <p:nvSpPr>
+          <p:cNvPr id="29" name="Rectangle 28"/>
           <p:cNvSpPr/>
           <p:nvPr/>
         </p:nvSpPr>
         <p:spPr>
           <a:xfrm>
-            <a:off x="731520" y="26727911"/>
+            <a:off x="22677120" y="11371325"/>
             <a:ext cx="20482560" cy="27432"/>
           </a:xfrm>
           <a:prstGeom prst="rect">
@@ -4076,13 +4244,13 @@
       </p:sp>
       <p:sp>
         <p:nvSpPr>
-          <p:cNvPr id="26" name="TextBox 25"/>
+          <p:cNvPr id="30" name="TextBox 29"/>
           <p:cNvSpPr txBox="1"/>
           <p:nvPr/>
         </p:nvSpPr>
         <p:spPr>
           <a:xfrm>
-            <a:off x="731520" y="27057095"/>
+            <a:off x="22677120" y="11700509"/>
             <a:ext cx="20482560" cy="365760"/>
           </a:xfrm>
           <a:prstGeom prst="rect">
@@ -4111,20 +4279,20 @@
                 </a:solidFill>
                 <a:latin typeface="Arial"/>
               </a:rPr>
-              <a:t>Two robots have put 2,686 camera frames and 91,955 telemetry rows across nine streams onto the platform, over 26 drives, with 342 m of GPS track from 1,502 fixes. None of the frames is labelled.</a:t>
-            </a:r>
-          </a:p>
-        </p:txBody>
-      </p:sp>
-      <p:sp>
-        <p:nvSpPr>
-          <p:cNvPr id="27" name="TextBox 26"/>
+              <a:t>Robot 241 is a tracked rover that drives crop rows and streams camera, GPS and two IMUs. The laser cart carries the weeder: a galvanometer laser, a down camera over the work zone and a forward camera. Ten projects sit on the platform and two of them have a robot reporting into them. Between those two vehicles, 2,686 frames in 26 drives.</a:t>
+            </a:r>
+          </a:p>
+        </p:txBody>
+      </p:sp>
+      <p:sp>
+        <p:nvSpPr>
+          <p:cNvPr id="31" name="TextBox 30"/>
           <p:cNvSpPr txBox="1"/>
           <p:nvPr/>
         </p:nvSpPr>
         <p:spPr>
           <a:xfrm>
-            <a:off x="22677120" y="10776965"/>
+            <a:off x="22677120" y="13467841"/>
             <a:ext cx="20482560" cy="365760"/>
           </a:xfrm>
           <a:prstGeom prst="rect">
@@ -4147,26 +4315,110 @@
               </a:spcAft>
             </a:pPr>
             <a:r>
+              <a:rPr sz="6200" b="1">
+                <a:solidFill>
+                  <a:srgbClr val="1C6FB5"/>
+                </a:solidFill>
+                <a:latin typeface="Arial Narrow"/>
+              </a:rPr>
+              <a:t>1,389</a:t>
+            </a:r>
+          </a:p>
+        </p:txBody>
+      </p:sp>
+      <p:sp>
+        <p:nvSpPr>
+          <p:cNvPr id="32" name="TextBox 31"/>
+          <p:cNvSpPr txBox="1"/>
+          <p:nvPr/>
+        </p:nvSpPr>
+        <p:spPr>
+          <a:xfrm>
+            <a:off x="22677120" y="14270989"/>
+            <a:ext cx="20482560" cy="365760"/>
+          </a:xfrm>
+          <a:prstGeom prst="rect">
+            <a:avLst/>
+          </a:prstGeom>
+          <a:noFill/>
+        </p:spPr>
+        <p:txBody>
+          <a:bodyPr wrap="square" lIns="0" rIns="0" tIns="0" bIns="0">
+            <a:spAutoFit/>
+          </a:bodyPr>
+          <a:lstStyle/>
+          <a:p>
+            <a:pPr algn="l">
+              <a:lnSpc>
+                <a:spcPct val="122000"/>
+              </a:lnSpc>
+              <a:spcAft>
+                <a:spcPts val="600"/>
+              </a:spcAft>
+            </a:pPr>
+            <a:r>
+              <a:rPr sz="1700" b="0">
+                <a:solidFill>
+                  <a:srgbClr val="6A6A6A"/>
+                </a:solidFill>
+                <a:latin typeface="Arial"/>
+              </a:rPr>
+              <a:t>joystick commands through the platform</a:t>
+            </a:r>
+          </a:p>
+        </p:txBody>
+      </p:sp>
+      <p:sp>
+        <p:nvSpPr>
+          <p:cNvPr id="33" name="TextBox 32"/>
+          <p:cNvSpPr txBox="1"/>
+          <p:nvPr/>
+        </p:nvSpPr>
+        <p:spPr>
+          <a:xfrm>
+            <a:off x="22677120" y="14756891"/>
+            <a:ext cx="20482560" cy="365760"/>
+          </a:xfrm>
+          <a:prstGeom prst="rect">
+            <a:avLst/>
+          </a:prstGeom>
+          <a:noFill/>
+        </p:spPr>
+        <p:txBody>
+          <a:bodyPr wrap="square" lIns="0" rIns="0" tIns="0" bIns="0">
+            <a:spAutoFit/>
+          </a:bodyPr>
+          <a:lstStyle/>
+          <a:p>
+            <a:pPr algn="l">
+              <a:lnSpc>
+                <a:spcPct val="95000"/>
+              </a:lnSpc>
+              <a:spcAft>
+                <a:spcPts val="0"/>
+              </a:spcAft>
+            </a:pPr>
+            <a:r>
               <a:rPr sz="3600" b="1">
                 <a:solidFill>
                   <a:srgbClr val="1A1A1A"/>
                 </a:solidFill>
                 <a:latin typeface="Arial Narrow"/>
               </a:rPr>
-              <a:t>Robots on the platform today</a:t>
-            </a:r>
-          </a:p>
-        </p:txBody>
-      </p:sp>
-      <p:sp>
-        <p:nvSpPr>
-          <p:cNvPr id="28" name="Rectangle 27"/>
+              <a:t>Driving a robot from a browser</a:t>
+            </a:r>
+          </a:p>
+        </p:txBody>
+      </p:sp>
+      <p:sp>
+        <p:nvSpPr>
+          <p:cNvPr id="34" name="Rectangle 33"/>
           <p:cNvSpPr/>
           <p:nvPr/>
         </p:nvSpPr>
         <p:spPr>
           <a:xfrm>
-            <a:off x="22677120" y="11371325"/>
+            <a:off x="22677120" y="15351251"/>
             <a:ext cx="20482560" cy="27432"/>
           </a:xfrm>
           <a:prstGeom prst="rect">
@@ -4204,13 +4456,13 @@
       </p:sp>
       <p:sp>
         <p:nvSpPr>
-          <p:cNvPr id="29" name="TextBox 28"/>
+          <p:cNvPr id="35" name="TextBox 34"/>
           <p:cNvSpPr txBox="1"/>
           <p:nvPr/>
         </p:nvSpPr>
         <p:spPr>
           <a:xfrm>
-            <a:off x="22677120" y="11700509"/>
+            <a:off x="22677120" y="15680435"/>
             <a:ext cx="20482560" cy="365760"/>
           </a:xfrm>
           <a:prstGeom prst="rect">
@@ -4239,20 +4491,20 @@
                 </a:solidFill>
                 <a:latin typeface="Arial"/>
               </a:rPr>
-              <a:t>Robot 241 is a tracked rover that drives crop rows and streams camera, GPS and two IMUs. The laser cart carries the weeder: a galvanometer laser, a down camera over the work zone and a forward camera. A Unitree humanoid has a project and has uploaded nothing yet. Between them the two ground vehicles have recorded 2,686 frames in 26 drives.</a:t>
-            </a:r>
-          </a:p>
-        </p:txBody>
-      </p:sp>
-      <p:sp>
-        <p:nvSpPr>
-          <p:cNvPr id="30" name="TextBox 29"/>
+              <a:t>A signed-in user opens the 241 project and clicks Drive. The platform reverse-proxies the robot's own console over the lab tailnet, so the rover is driven from a plain browser with no VPN client. 1,389 joystick commands have gone through that path. Two gates sit in front of it: the platform's Google login, then the robot's own password.</a:t>
+            </a:r>
+          </a:p>
+        </p:txBody>
+      </p:sp>
+      <p:sp>
+        <p:nvSpPr>
+          <p:cNvPr id="36" name="TextBox 35"/>
           <p:cNvSpPr txBox="1"/>
           <p:nvPr/>
         </p:nvSpPr>
         <p:spPr>
           <a:xfrm>
-            <a:off x="22677120" y="13467841"/>
+            <a:off x="22677120" y="17447767"/>
             <a:ext cx="20482560" cy="365760"/>
           </a:xfrm>
           <a:prstGeom prst="rect">
@@ -4281,20 +4533,20 @@
                 </a:solidFill>
                 <a:latin typeface="Arial Narrow"/>
               </a:rPr>
-              <a:t>Driving a robot from a browser</a:t>
-            </a:r>
-          </a:p>
-        </p:txBody>
-      </p:sp>
-      <p:sp>
-        <p:nvSpPr>
-          <p:cNvPr id="31" name="Rectangle 30"/>
+              <a:t>Left alone for fifteen rounds</a:t>
+            </a:r>
+          </a:p>
+        </p:txBody>
+      </p:sp>
+      <p:sp>
+        <p:nvSpPr>
+          <p:cNvPr id="37" name="Rectangle 36"/>
           <p:cNvSpPr/>
           <p:nvPr/>
         </p:nvSpPr>
         <p:spPr>
           <a:xfrm>
-            <a:off x="22677120" y="14062201"/>
+            <a:off x="22677120" y="18042127"/>
             <a:ext cx="20482560" cy="27432"/>
           </a:xfrm>
           <a:prstGeom prst="rect">
@@ -4330,15 +4582,81 @@
           </a:p>
         </p:txBody>
       </p:sp>
-      <p:sp>
-        <p:nvSpPr>
-          <p:cNvPr id="32" name="TextBox 31"/>
+      <p:pic>
+        <p:nvPicPr>
+          <p:cNvPr id="38" name="Picture 37" descr="f_rounds.png"/>
+          <p:cNvPicPr>
+            <a:picLocks noChangeAspect="1"/>
+          </p:cNvPicPr>
+          <p:nvPr/>
+        </p:nvPicPr>
+        <p:blipFill>
+          <a:blip r:embed="rId4"/>
+          <a:stretch>
+            <a:fillRect/>
+          </a:stretch>
+        </p:blipFill>
+        <p:spPr>
+          <a:xfrm>
+            <a:off x="22677120" y="18371311"/>
+            <a:ext cx="20482560" cy="4663440"/>
+          </a:xfrm>
+          <a:prstGeom prst="rect">
+            <a:avLst/>
+          </a:prstGeom>
+        </p:spPr>
+      </p:pic>
+      <p:sp>
+        <p:nvSpPr>
+          <p:cNvPr id="39" name="TextBox 38"/>
           <p:cNvSpPr txBox="1"/>
           <p:nvPr/>
         </p:nvSpPr>
         <p:spPr>
           <a:xfrm>
-            <a:off x="22677120" y="14391385"/>
+            <a:off x="22677120" y="23144479"/>
+            <a:ext cx="20482560" cy="365760"/>
+          </a:xfrm>
+          <a:prstGeom prst="rect">
+            <a:avLst/>
+          </a:prstGeom>
+          <a:noFill/>
+        </p:spPr>
+        <p:txBody>
+          <a:bodyPr wrap="square" lIns="0" rIns="0" tIns="0" bIns="0">
+            <a:spAutoFit/>
+          </a:bodyPr>
+          <a:lstStyle/>
+          <a:p>
+            <a:pPr algn="l">
+              <a:lnSpc>
+                <a:spcPct val="118000"/>
+              </a:lnSpc>
+              <a:spcAft>
+                <a:spcPts val="0"/>
+              </a:spcAft>
+            </a:pPr>
+            <a:r>
+              <a:rPr sz="1700" b="0">
+                <a:solidFill>
+                  <a:srgbClr val="6A6A6A"/>
+                </a:solidFill>
+                <a:latin typeface="Arial"/>
+              </a:rPr>
+              <a:t>Figure 4.  (f) Fifteen unattended rounds on a fixed holdout. (g) Round 15's exact dataset, three ways. The first two marks differ only in the starting weights, so their gap is the warm-start chain; the third is the recipe the campaign ran, whose wall-clock cap truncates the cosine, with its three seeds drawn behind it. Sigma throughout is that recipe's own seed spread, 0.0040 over three seeds, propagated to the difference being quoted. Completing the schedule is not the fix -- the second mark sits below the third.</a:t>
+            </a:r>
+          </a:p>
+        </p:txBody>
+      </p:sp>
+      <p:sp>
+        <p:nvSpPr>
+          <p:cNvPr id="40" name="TextBox 39"/>
+          <p:cNvSpPr txBox="1"/>
+          <p:nvPr/>
+        </p:nvSpPr>
+        <p:spPr>
+          <a:xfrm>
+            <a:off x="22677120" y="24219661"/>
             <a:ext cx="20482560" cy="365760"/>
           </a:xfrm>
           <a:prstGeom prst="rect">
@@ -4367,69 +4685,27 @@
                 </a:solidFill>
                 <a:latin typeface="Arial"/>
               </a:rPr>
-              <a:t>A signed-in user opens the 241 project and clicks Drive. The platform reverse-proxies the robot's own console over the lab tailnet, so the rover is driven from a plain browser with no VPN client. 1,389 joystick commands have gone through that path. Two gates sit in front of it: the platform's Google login, then the robot's own password.</a:t>
-            </a:r>
-          </a:p>
-        </p:txBody>
-      </p:sp>
-      <p:sp>
-        <p:nvSpPr>
-          <p:cNvPr id="33" name="TextBox 32"/>
-          <p:cNvSpPr txBox="1"/>
-          <p:nvPr/>
-        </p:nvSpPr>
-        <p:spPr>
-          <a:xfrm>
-            <a:off x="22677120" y="16158717"/>
-            <a:ext cx="20482560" cy="365760"/>
-          </a:xfrm>
-          <a:prstGeom prst="rect">
-            <a:avLst/>
-          </a:prstGeom>
-          <a:noFill/>
-        </p:spPr>
-        <p:txBody>
-          <a:bodyPr wrap="square" lIns="0" rIns="0" tIns="0" bIns="0">
-            <a:spAutoFit/>
-          </a:bodyPr>
-          <a:lstStyle/>
-          <a:p>
-            <a:pPr algn="l">
-              <a:lnSpc>
-                <a:spcPct val="95000"/>
-              </a:lnSpc>
-              <a:spcAft>
-                <a:spcPts val="0"/>
-              </a:spcAft>
-            </a:pPr>
-            <a:r>
-              <a:rPr sz="3600" b="1">
-                <a:solidFill>
-                  <a:srgbClr val="1A1A1A"/>
-                </a:solidFill>
-                <a:latin typeface="Arial Narrow"/>
-              </a:rPr>
-              <a:t>Left alone for fifteen rounds</a:t>
-            </a:r>
-          </a:p>
-        </p:txBody>
-      </p:sp>
-      <p:sp>
-        <p:nvSpPr>
-          <p:cNvPr id="34" name="Rectangle 33"/>
+              <a:t>Two cluster jobs, one collecting and one training, ran fifteen rounds against the locked registry with nobody in the room. Each round searched public sources, filtered what it found, merged, trained and evaluated. Every round reported success. Accuracy fell for fifteen rounds. This part is built and is switched off today.</a:t>
+            </a:r>
+          </a:p>
+        </p:txBody>
+      </p:sp>
+      <p:sp>
+        <p:nvSpPr>
+          <p:cNvPr id="41" name="Rectangle 40"/>
           <p:cNvSpPr/>
           <p:nvPr/>
         </p:nvSpPr>
         <p:spPr>
           <a:xfrm>
-            <a:off x="22677120" y="16753077"/>
-            <a:ext cx="20482560" cy="27432"/>
+            <a:off x="731520" y="30632400"/>
+            <a:ext cx="42428160" cy="20116"/>
           </a:xfrm>
           <a:prstGeom prst="rect">
             <a:avLst/>
           </a:prstGeom>
           <a:solidFill>
-            <a:srgbClr val="1C6FB5"/>
+            <a:srgbClr val="D5D5D5"/>
           </a:solidFill>
           <a:ln>
             <a:noFill/>
@@ -4458,161 +4734,9 @@
           </a:p>
         </p:txBody>
       </p:sp>
-      <p:pic>
-        <p:nvPicPr>
-          <p:cNvPr id="35" name="Picture 34" descr="f_rounds.png"/>
-          <p:cNvPicPr>
-            <a:picLocks noChangeAspect="1"/>
-          </p:cNvPicPr>
-          <p:nvPr/>
-        </p:nvPicPr>
-        <p:blipFill>
-          <a:blip r:embed="rId4"/>
-          <a:stretch>
-            <a:fillRect/>
-          </a:stretch>
-        </p:blipFill>
-        <p:spPr>
-          <a:xfrm>
-            <a:off x="22677120" y="17082261"/>
-            <a:ext cx="20482560" cy="4663440"/>
-          </a:xfrm>
-          <a:prstGeom prst="rect">
-            <a:avLst/>
-          </a:prstGeom>
-        </p:spPr>
-      </p:pic>
-      <p:sp>
-        <p:nvSpPr>
-          <p:cNvPr id="36" name="TextBox 35"/>
-          <p:cNvSpPr txBox="1"/>
-          <p:nvPr/>
-        </p:nvSpPr>
-        <p:spPr>
-          <a:xfrm>
-            <a:off x="22677120" y="21855429"/>
-            <a:ext cx="20482560" cy="365760"/>
-          </a:xfrm>
-          <a:prstGeom prst="rect">
-            <a:avLst/>
-          </a:prstGeom>
-          <a:noFill/>
-        </p:spPr>
-        <p:txBody>
-          <a:bodyPr wrap="square" lIns="0" rIns="0" tIns="0" bIns="0">
-            <a:spAutoFit/>
-          </a:bodyPr>
-          <a:lstStyle/>
-          <a:p>
-            <a:pPr algn="l">
-              <a:lnSpc>
-                <a:spcPct val="118000"/>
-              </a:lnSpc>
-              <a:spcAft>
-                <a:spcPts val="0"/>
-              </a:spcAft>
-            </a:pPr>
-            <a:r>
-              <a:rPr sz="1700" b="0">
-                <a:solidFill>
-                  <a:srgbClr val="6A6A6A"/>
-                </a:solidFill>
-                <a:latin typeface="Arial"/>
-              </a:rPr>
-              <a:t>Figure 4.  (f) Fifteen unattended rounds on a fixed holdout. (g) Round 15's exact dataset, three ways. The first two marks differ only in the starting weights, so their gap is the warm-start chain; the third is the recipe the campaign ran, whose wall-clock cap truncates the cosine, with its three seeds drawn behind it. Sigma throughout is that recipe's own seed spread, 0.0040 over three seeds, propagated to the difference being quoted. Completing the schedule is not the fix -- the second mark sits below the third.</a:t>
-            </a:r>
-          </a:p>
-        </p:txBody>
-      </p:sp>
-      <p:sp>
-        <p:nvSpPr>
-          <p:cNvPr id="37" name="TextBox 36"/>
-          <p:cNvSpPr txBox="1"/>
-          <p:nvPr/>
-        </p:nvSpPr>
-        <p:spPr>
-          <a:xfrm>
-            <a:off x="22677120" y="22930611"/>
-            <a:ext cx="20482560" cy="365760"/>
-          </a:xfrm>
-          <a:prstGeom prst="rect">
-            <a:avLst/>
-          </a:prstGeom>
-          <a:noFill/>
-        </p:spPr>
-        <p:txBody>
-          <a:bodyPr wrap="square" lIns="0" rIns="0" tIns="0" bIns="0">
-            <a:spAutoFit/>
-          </a:bodyPr>
-          <a:lstStyle/>
-          <a:p>
-            <a:pPr algn="l">
-              <a:lnSpc>
-                <a:spcPct val="122000"/>
-              </a:lnSpc>
-              <a:spcAft>
-                <a:spcPts val="1400"/>
-              </a:spcAft>
-            </a:pPr>
-            <a:r>
-              <a:rPr sz="2200" b="0">
-                <a:solidFill>
-                  <a:srgbClr val="1A1A1A"/>
-                </a:solidFill>
-                <a:latin typeface="Arial"/>
-              </a:rPr>
-              <a:t>Two cluster jobs, one collecting and one training, ran fifteen rounds against the locked registry with nobody in the room. Each round searched public sources, filtered what it found, merged, trained and evaluated. Every round reported success. Accuracy fell for fifteen rounds. This part is built and is switched off today.</a:t>
-            </a:r>
-          </a:p>
-        </p:txBody>
-      </p:sp>
-      <p:sp>
-        <p:nvSpPr>
-          <p:cNvPr id="38" name="Rectangle 37"/>
-          <p:cNvSpPr/>
-          <p:nvPr/>
-        </p:nvSpPr>
-        <p:spPr>
-          <a:xfrm>
-            <a:off x="731520" y="30632400"/>
-            <a:ext cx="42428160" cy="20116"/>
-          </a:xfrm>
-          <a:prstGeom prst="rect">
-            <a:avLst/>
-          </a:prstGeom>
-          <a:solidFill>
-            <a:srgbClr val="D5D5D5"/>
-          </a:solidFill>
-          <a:ln>
-            <a:noFill/>
-          </a:ln>
-          <a:effectLst/>
-        </p:spPr>
-        <p:style>
-          <a:lnRef idx="1">
-            <a:schemeClr val="accent1"/>
-          </a:lnRef>
-          <a:fillRef idx="3">
-            <a:schemeClr val="accent1"/>
-          </a:fillRef>
-          <a:effectRef idx="2">
-            <a:schemeClr val="accent1"/>
-          </a:effectRef>
-          <a:fontRef idx="minor">
-            <a:schemeClr val="lt1"/>
-          </a:fontRef>
-        </p:style>
-        <p:txBody>
-          <a:bodyPr rtlCol="0" anchor="ctr"/>
-          <a:lstStyle/>
-          <a:p>
-            <a:pPr algn="ctr"/>
-          </a:p>
-        </p:txBody>
-      </p:sp>
-      <p:sp>
-        <p:nvSpPr>
-          <p:cNvPr id="39" name="TextBox 38"/>
+      <p:sp>
+        <p:nvSpPr>
+          <p:cNvPr id="42" name="TextBox 41"/>
           <p:cNvSpPr txBox="1"/>
           <p:nvPr/>
         </p:nvSpPr>
@@ -4654,7 +4778,7 @@
       </p:sp>
       <p:sp>
         <p:nvSpPr>
-          <p:cNvPr id="40" name="TextBox 39"/>
+          <p:cNvPr id="43" name="TextBox 42"/>
           <p:cNvSpPr txBox="1"/>
           <p:nvPr/>
         </p:nvSpPr>
@@ -4696,7 +4820,7 @@
       </p:sp>
       <p:sp>
         <p:nvSpPr>
-          <p:cNvPr id="41" name="TextBox 40"/>
+          <p:cNvPr id="44" name="TextBox 43"/>
           <p:cNvSpPr txBox="1"/>
           <p:nvPr/>
         </p:nvSpPr>
